--- a/docs/hub/estate/Faculty of Health and Education/Deans Office/Faculty Strategy/Faculty Strategy 1052-55 glossy DRAFT DO NOT CIRCULATE.pptx
+++ b/docs/hub/estate/Faculty of Health and Education/Deans Office/Faculty Strategy/Faculty Strategy 1052-55 glossy DRAFT DO NOT CIRCULATE.pptx
@@ -3631,7 +3631,7 @@
               </a:defRPr>
             </a:pPr>
             <a:r>
-              <a:t>• 2729 students!! 12 programmes!! 2 departments!!</a:t>
+              <a:t>• 3366 students!! 12 programmes!! 2 departments!!</a:t>
             </a:r>
           </a:p>
           <a:p>
@@ -3797,7 +3797,7 @@
               </a:defRPr>
             </a:pPr>
             <a:r>
-              <a:t>• Awarding gap: 18.9 percentage points (we can fix this!!)</a:t>
+              <a:t>• Awarding gap: 21.5 percentage points (we can fix this!!)</a:t>
             </a:r>
           </a:p>
           <a:p>
